--- a/lecture_pptx/out/s22/ワーク01.pptx
+++ b/lecture_pptx/out/s22/ワーク01.pptx
@@ -2279,7 +2279,7 @@
         <p:spPr>
           <a:xfrm>
             <a:off x="365760" y="1188720"/>
-            <a:ext cx="1979676" cy="2468880"/>
+            <a:ext cx="1979676" cy="3017520"/>
           </a:xfrm>
           <a:prstGeom prst="roundRect">
             <a:avLst>
@@ -2386,8 +2386,8 @@
         </p:nvSpPr>
         <p:spPr>
           <a:xfrm>
-            <a:off x="530352" y="1901952"/>
-            <a:ext cx="1650492" cy="1645920"/>
+            <a:off x="530352" y="1938528"/>
+            <a:ext cx="1650492" cy="2148840"/>
           </a:xfrm>
           <a:prstGeom prst="rect">
             <a:avLst/>
@@ -2401,12 +2401,12 @@
           <a:p>
             <a:pPr indent="0" marL="0">
               <a:spcAft>
-                <a:spcPts val="200"/>
+                <a:spcPts val="600"/>
               </a:spcAft>
               <a:buNone/>
             </a:pPr>
             <a:r>
-              <a:rPr lang="en-US" sz="1300" dirty="0">
+              <a:rPr lang="en-US" sz="1600" dirty="0">
                 <a:solidFill>
                   <a:srgbClr val="1A1A1A"/>
                 </a:solidFill>
@@ -2416,7 +2416,7 @@
               </a:rPr>
               <a:t>個別ツールを実業務フローに組み込むこと。</a:t>
             </a:r>
-            <a:endParaRPr lang="en-US" sz="1300" dirty="0"/>
+            <a:endParaRPr lang="en-US" sz="1600" dirty="0"/>
           </a:p>
         </p:txBody>
       </p:sp>
@@ -2429,7 +2429,7 @@
         <p:spPr>
           <a:xfrm>
             <a:off x="2510028" y="1188720"/>
-            <a:ext cx="1979676" cy="2468880"/>
+            <a:ext cx="1979676" cy="3017520"/>
           </a:xfrm>
           <a:prstGeom prst="roundRect">
             <a:avLst>
@@ -2536,8 +2536,8 @@
         </p:nvSpPr>
         <p:spPr>
           <a:xfrm>
-            <a:off x="2674620" y="1901952"/>
-            <a:ext cx="1650492" cy="1645920"/>
+            <a:off x="2674620" y="1938528"/>
+            <a:ext cx="1650492" cy="2148840"/>
           </a:xfrm>
           <a:prstGeom prst="rect">
             <a:avLst/>
@@ -2551,11 +2551,11 @@
           <a:p>
             <a:pPr indent="0" marL="0">
               <a:spcAft>
-                <a:spcPts val="200"/>
+                <a:spcPts val="600"/>
               </a:spcAft>
               <a:buNone/>
             </a:pPr>
-            <a:endParaRPr lang="en-US" sz="1300" dirty="0"/>
+            <a:endParaRPr lang="en-US" sz="1600" dirty="0"/>
           </a:p>
         </p:txBody>
       </p:sp>
@@ -2568,7 +2568,7 @@
         <p:spPr>
           <a:xfrm>
             <a:off x="4654296" y="1188720"/>
-            <a:ext cx="1979676" cy="2468880"/>
+            <a:ext cx="1979676" cy="3017520"/>
           </a:xfrm>
           <a:prstGeom prst="roundRect">
             <a:avLst>
@@ -2675,8 +2675,8 @@
         </p:nvSpPr>
         <p:spPr>
           <a:xfrm>
-            <a:off x="4818888" y="1901952"/>
-            <a:ext cx="1650492" cy="1645920"/>
+            <a:off x="4818888" y="1938528"/>
+            <a:ext cx="1650492" cy="2148840"/>
           </a:xfrm>
           <a:prstGeom prst="rect">
             <a:avLst/>
@@ -2690,12 +2690,12 @@
           <a:p>
             <a:pPr indent="0" marL="0">
               <a:spcAft>
-                <a:spcPts val="200"/>
+                <a:spcPts val="600"/>
               </a:spcAft>
               <a:buNone/>
             </a:pPr>
             <a:r>
-              <a:rPr lang="en-US" sz="1300" dirty="0">
+              <a:rPr lang="en-US" sz="1600" dirty="0">
                 <a:solidFill>
                   <a:srgbClr val="1A1A1A"/>
                 </a:solidFill>
@@ -2705,7 +2705,7 @@
               </a:rPr>
               <a:t>新しい習慣が定着する目安期間。</a:t>
             </a:r>
-            <a:endParaRPr lang="en-US" sz="1300" dirty="0"/>
+            <a:endParaRPr lang="en-US" sz="1600" dirty="0"/>
           </a:p>
         </p:txBody>
       </p:sp>
@@ -2718,7 +2718,7 @@
         <p:spPr>
           <a:xfrm>
             <a:off x="6798564" y="1188720"/>
-            <a:ext cx="1979676" cy="2468880"/>
+            <a:ext cx="1979676" cy="3017520"/>
           </a:xfrm>
           <a:prstGeom prst="roundRect">
             <a:avLst>
@@ -2825,8 +2825,8 @@
         </p:nvSpPr>
         <p:spPr>
           <a:xfrm>
-            <a:off x="6963156" y="1901952"/>
-            <a:ext cx="1650492" cy="1645920"/>
+            <a:off x="6963156" y="1938528"/>
+            <a:ext cx="1650492" cy="2148840"/>
           </a:xfrm>
           <a:prstGeom prst="rect">
             <a:avLst/>
@@ -2840,12 +2840,12 @@
           <a:p>
             <a:pPr indent="0" marL="0">
               <a:spcAft>
-                <a:spcPts val="200"/>
+                <a:spcPts val="600"/>
               </a:spcAft>
               <a:buNone/>
             </a:pPr>
             <a:r>
-              <a:rPr lang="en-US" sz="1300" dirty="0">
+              <a:rPr lang="en-US" sz="1600" dirty="0">
                 <a:solidFill>
                   <a:srgbClr val="1A1A1A"/>
                 </a:solidFill>
@@ -2855,7 +2855,7 @@
               </a:rPr>
               <a:t>導入前後で時間/成果を比較。</a:t>
             </a:r>
-            <a:endParaRPr lang="en-US" sz="1300" dirty="0"/>
+            <a:endParaRPr lang="en-US" sz="1600" dirty="0"/>
           </a:p>
         </p:txBody>
       </p:sp>
@@ -2867,8 +2867,8 @@
         </p:nvSpPr>
         <p:spPr>
           <a:xfrm>
-            <a:off x="365760" y="3931920"/>
-            <a:ext cx="8412480" cy="1188720"/>
+            <a:off x="365760" y="4389120"/>
+            <a:ext cx="8412480" cy="914400"/>
           </a:xfrm>
           <a:prstGeom prst="rect">
             <a:avLst/>
